--- a/전남광주_미래전환기금/output/전남광주_미래전환기금_보고서_민형배시장.pptx
+++ b/전남광주_미래전환기금/output/전남광주_미래전환기금_보고서_민형배시장.pptx
@@ -6620,14 +6620,49 @@
       </p:sp>
       <p:sp>
         <p:nvSpPr>
-          <p:cNvPr id="6" name="Rectangle 5"/>
-          <p:cNvSpPr/>
-          <p:nvPr/>
-        </p:nvSpPr>
-        <p:spPr>
-          <a:xfrm>
-            <a:off x="4937760" y="1143000"/>
-            <a:ext cx="2286000" cy="548640"/>
+          <p:cNvPr id="6" name="TextBox 5"/>
+          <p:cNvSpPr txBox="1"/>
+          <p:nvPr/>
+        </p:nvSpPr>
+        <p:spPr>
+          <a:xfrm>
+            <a:off x="365760" y="1143000"/>
+            <a:ext cx="5486400" cy="292608"/>
+          </a:xfrm>
+          <a:prstGeom prst="rect">
+            <a:avLst/>
+          </a:prstGeom>
+          <a:noFill/>
+        </p:spPr>
+        <p:txBody>
+          <a:bodyPr wrap="square">
+            <a:spAutoFit/>
+          </a:bodyPr>
+          <a:lstStyle/>
+          <a:p>
+            <a:pPr algn="l"/>
+            <a:r>
+              <a:rPr sz="1400" b="1" i="0">
+                <a:solidFill>
+                  <a:srgbClr val="1A237E"/>
+                </a:solidFill>
+                <a:latin typeface="맑은 고딕"/>
+              </a:rPr>
+              <a:t>■ 거버넌스 체계</a:t>
+            </a:r>
+          </a:p>
+        </p:txBody>
+      </p:sp>
+      <p:sp>
+        <p:nvSpPr>
+          <p:cNvPr id="7" name="Rectangle 6"/>
+          <p:cNvSpPr/>
+          <p:nvPr/>
+        </p:nvSpPr>
+        <p:spPr>
+          <a:xfrm>
+            <a:off x="1554480" y="1508760"/>
+            <a:ext cx="3108960" cy="457200"/>
           </a:xfrm>
           <a:prstGeom prst="rect">
             <a:avLst/>
@@ -6663,14 +6698,14 @@
       </p:sp>
       <p:sp>
         <p:nvSpPr>
-          <p:cNvPr id="7" name="TextBox 6"/>
-          <p:cNvSpPr txBox="1"/>
-          <p:nvPr/>
-        </p:nvSpPr>
-        <p:spPr>
-          <a:xfrm>
-            <a:off x="4983480" y="1188720"/>
-            <a:ext cx="2194560" cy="457200"/>
+          <p:cNvPr id="8" name="TextBox 7"/>
+          <p:cNvSpPr txBox="1"/>
+          <p:nvPr/>
+        </p:nvSpPr>
+        <p:spPr>
+          <a:xfrm>
+            <a:off x="1600200" y="1536192"/>
+            <a:ext cx="3017520" cy="402336"/>
           </a:xfrm>
           <a:prstGeom prst="rect">
             <a:avLst/>
@@ -6698,14 +6733,14 @@
       </p:sp>
       <p:sp>
         <p:nvSpPr>
-          <p:cNvPr id="8" name="Rectangle 7"/>
-          <p:cNvSpPr/>
-          <p:nvPr/>
-        </p:nvSpPr>
-        <p:spPr>
-          <a:xfrm>
-            <a:off x="4389120" y="1965960"/>
-            <a:ext cx="3383280" cy="548640"/>
+          <p:cNvPr id="9" name="Rectangle 8"/>
+          <p:cNvSpPr/>
+          <p:nvPr/>
+        </p:nvSpPr>
+        <p:spPr>
+          <a:xfrm>
+            <a:off x="1280160" y="2194560"/>
+            <a:ext cx="3657600" cy="548640"/>
           </a:xfrm>
           <a:prstGeom prst="rect">
             <a:avLst/>
@@ -6741,14 +6776,14 @@
       </p:sp>
       <p:sp>
         <p:nvSpPr>
-          <p:cNvPr id="9" name="TextBox 8"/>
-          <p:cNvSpPr txBox="1"/>
-          <p:nvPr/>
-        </p:nvSpPr>
-        <p:spPr>
-          <a:xfrm>
-            <a:off x="4434840" y="2011679"/>
-            <a:ext cx="3291840" cy="457200"/>
+          <p:cNvPr id="10" name="TextBox 9"/>
+          <p:cNvSpPr txBox="1"/>
+          <p:nvPr/>
+        </p:nvSpPr>
+        <p:spPr>
+          <a:xfrm>
+            <a:off x="1325880" y="2221991"/>
+            <a:ext cx="3566160" cy="493776"/>
           </a:xfrm>
           <a:prstGeom prst="rect">
             <a:avLst/>
@@ -6777,14 +6812,14 @@
       </p:sp>
       <p:sp>
         <p:nvSpPr>
-          <p:cNvPr id="10" name="Rectangle 9"/>
+          <p:cNvPr id="11" name="Rectangle 10"/>
           <p:cNvSpPr/>
           <p:nvPr/>
         </p:nvSpPr>
         <p:spPr>
           <a:xfrm>
             <a:off x="365760" y="3017520"/>
-            <a:ext cx="2651760" cy="548640"/>
+            <a:ext cx="2743200" cy="777240"/>
           </a:xfrm>
           <a:prstGeom prst="rect">
             <a:avLst/>
@@ -6820,14 +6855,14 @@
       </p:sp>
       <p:sp>
         <p:nvSpPr>
-          <p:cNvPr id="11" name="TextBox 10"/>
-          <p:cNvSpPr txBox="1"/>
-          <p:nvPr/>
-        </p:nvSpPr>
-        <p:spPr>
-          <a:xfrm>
-            <a:off x="411480" y="3063239"/>
-            <a:ext cx="2560320" cy="457200"/>
+          <p:cNvPr id="12" name="TextBox 11"/>
+          <p:cNvSpPr txBox="1"/>
+          <p:nvPr/>
+        </p:nvSpPr>
+        <p:spPr>
+          <a:xfrm>
+            <a:off x="411480" y="3044951"/>
+            <a:ext cx="2651760" cy="722376"/>
           </a:xfrm>
           <a:prstGeom prst="rect">
             <a:avLst/>
@@ -6848,21 +6883,22 @@
                 </a:solidFill>
                 <a:latin typeface="맑은 고딕"/>
               </a:rPr>
-              <a:t>투자정책위원회</a:t>
-            </a:r>
-          </a:p>
-        </p:txBody>
-      </p:sp>
-      <p:sp>
-        <p:nvSpPr>
-          <p:cNvPr id="12" name="Rectangle 11"/>
+              <a:t>투자정책
+위원회</a:t>
+            </a:r>
+          </a:p>
+        </p:txBody>
+      </p:sp>
+      <p:sp>
+        <p:nvSpPr>
+          <p:cNvPr id="13" name="Rectangle 12"/>
           <p:cNvSpPr/>
           <p:nvPr/>
         </p:nvSpPr>
         <p:spPr>
           <a:xfrm>
             <a:off x="3200400" y="3017520"/>
-            <a:ext cx="2651760" cy="548640"/>
+            <a:ext cx="2743200" cy="777240"/>
           </a:xfrm>
           <a:prstGeom prst="rect">
             <a:avLst/>
@@ -6898,14 +6934,14 @@
       </p:sp>
       <p:sp>
         <p:nvSpPr>
-          <p:cNvPr id="13" name="TextBox 12"/>
-          <p:cNvSpPr txBox="1"/>
-          <p:nvPr/>
-        </p:nvSpPr>
-        <p:spPr>
-          <a:xfrm>
-            <a:off x="3246120" y="3063239"/>
-            <a:ext cx="2560320" cy="457200"/>
+          <p:cNvPr id="14" name="TextBox 13"/>
+          <p:cNvSpPr txBox="1"/>
+          <p:nvPr/>
+        </p:nvSpPr>
+        <p:spPr>
+          <a:xfrm>
+            <a:off x="3246120" y="3044951"/>
+            <a:ext cx="2651760" cy="722376"/>
           </a:xfrm>
           <a:prstGeom prst="rect">
             <a:avLst/>
@@ -6926,21 +6962,22 @@
                 </a:solidFill>
                 <a:latin typeface="맑은 고딕"/>
               </a:rPr>
-              <a:t>위험관리위원회</a:t>
-            </a:r>
-          </a:p>
-        </p:txBody>
-      </p:sp>
-      <p:sp>
-        <p:nvSpPr>
-          <p:cNvPr id="14" name="Rectangle 13"/>
-          <p:cNvSpPr/>
-          <p:nvPr/>
-        </p:nvSpPr>
-        <p:spPr>
-          <a:xfrm>
-            <a:off x="6035040" y="3017520"/>
-            <a:ext cx="2651760" cy="548640"/>
+              <a:t>위험관리
+위원회</a:t>
+            </a:r>
+          </a:p>
+        </p:txBody>
+      </p:sp>
+      <p:sp>
+        <p:nvSpPr>
+          <p:cNvPr id="15" name="Rectangle 14"/>
+          <p:cNvSpPr/>
+          <p:nvPr/>
+        </p:nvSpPr>
+        <p:spPr>
+          <a:xfrm>
+            <a:off x="365760" y="3931920"/>
+            <a:ext cx="2743200" cy="777240"/>
           </a:xfrm>
           <a:prstGeom prst="rect">
             <a:avLst/>
@@ -6976,14 +7013,14 @@
       </p:sp>
       <p:sp>
         <p:nvSpPr>
-          <p:cNvPr id="15" name="TextBox 14"/>
-          <p:cNvSpPr txBox="1"/>
-          <p:nvPr/>
-        </p:nvSpPr>
-        <p:spPr>
-          <a:xfrm>
-            <a:off x="6080759" y="3063239"/>
-            <a:ext cx="2560320" cy="457200"/>
+          <p:cNvPr id="16" name="TextBox 15"/>
+          <p:cNvSpPr txBox="1"/>
+          <p:nvPr/>
+        </p:nvSpPr>
+        <p:spPr>
+          <a:xfrm>
+            <a:off x="411480" y="3959352"/>
+            <a:ext cx="2651760" cy="722376"/>
           </a:xfrm>
           <a:prstGeom prst="rect">
             <a:avLst/>
@@ -7004,21 +7041,22 @@
                 </a:solidFill>
                 <a:latin typeface="맑은 고딕"/>
               </a:rPr>
-              <a:t>지역전략사업위원회</a:t>
-            </a:r>
-          </a:p>
-        </p:txBody>
-      </p:sp>
-      <p:sp>
-        <p:nvSpPr>
-          <p:cNvPr id="16" name="Rectangle 15"/>
-          <p:cNvSpPr/>
-          <p:nvPr/>
-        </p:nvSpPr>
-        <p:spPr>
-          <a:xfrm>
-            <a:off x="8869680" y="3017520"/>
-            <a:ext cx="2651760" cy="548640"/>
+              <a:t>지역전략사업
+위원회</a:t>
+            </a:r>
+          </a:p>
+        </p:txBody>
+      </p:sp>
+      <p:sp>
+        <p:nvSpPr>
+          <p:cNvPr id="17" name="Rectangle 16"/>
+          <p:cNvSpPr/>
+          <p:nvPr/>
+        </p:nvSpPr>
+        <p:spPr>
+          <a:xfrm>
+            <a:off x="3200400" y="3931920"/>
+            <a:ext cx="2743200" cy="777240"/>
           </a:xfrm>
           <a:prstGeom prst="rect">
             <a:avLst/>
@@ -7054,14 +7092,14 @@
       </p:sp>
       <p:sp>
         <p:nvSpPr>
-          <p:cNvPr id="17" name="TextBox 16"/>
-          <p:cNvSpPr txBox="1"/>
-          <p:nvPr/>
-        </p:nvSpPr>
-        <p:spPr>
-          <a:xfrm>
-            <a:off x="8915400" y="3063239"/>
-            <a:ext cx="2560320" cy="457200"/>
+          <p:cNvPr id="18" name="TextBox 17"/>
+          <p:cNvSpPr txBox="1"/>
+          <p:nvPr/>
+        </p:nvSpPr>
+        <p:spPr>
+          <a:xfrm>
+            <a:off x="3246120" y="3959352"/>
+            <a:ext cx="2651760" cy="722376"/>
           </a:xfrm>
           <a:prstGeom prst="rect">
             <a:avLst/>
@@ -7082,21 +7120,22 @@
                 </a:solidFill>
                 <a:latin typeface="맑은 고딕"/>
               </a:rPr>
-              <a:t>시민감시위원회</a:t>
-            </a:r>
-          </a:p>
-        </p:txBody>
-      </p:sp>
-      <p:sp>
-        <p:nvSpPr>
-          <p:cNvPr id="18" name="Rectangle 17"/>
-          <p:cNvSpPr/>
-          <p:nvPr/>
-        </p:nvSpPr>
-        <p:spPr>
-          <a:xfrm>
-            <a:off x="3474720" y="4023360"/>
-            <a:ext cx="5029200" cy="548640"/>
+              <a:t>시민감시
+위원회</a:t>
+            </a:r>
+          </a:p>
+        </p:txBody>
+      </p:sp>
+      <p:sp>
+        <p:nvSpPr>
+          <p:cNvPr id="19" name="Rectangle 18"/>
+          <p:cNvSpPr/>
+          <p:nvPr/>
+        </p:nvSpPr>
+        <p:spPr>
+          <a:xfrm>
+            <a:off x="1280160" y="4846320"/>
+            <a:ext cx="3657600" cy="548640"/>
           </a:xfrm>
           <a:prstGeom prst="rect">
             <a:avLst/>
@@ -7132,14 +7171,14 @@
       </p:sp>
       <p:sp>
         <p:nvSpPr>
-          <p:cNvPr id="19" name="TextBox 18"/>
-          <p:cNvSpPr txBox="1"/>
-          <p:nvPr/>
-        </p:nvSpPr>
-        <p:spPr>
-          <a:xfrm>
-            <a:off x="3520439" y="4069080"/>
-            <a:ext cx="4937760" cy="457200"/>
+          <p:cNvPr id="20" name="TextBox 19"/>
+          <p:cNvSpPr txBox="1"/>
+          <p:nvPr/>
+        </p:nvSpPr>
+        <p:spPr>
+          <a:xfrm>
+            <a:off x="1325880" y="4873752"/>
+            <a:ext cx="3566160" cy="493776"/>
           </a:xfrm>
           <a:prstGeom prst="rect">
             <a:avLst/>
@@ -7160,27 +7199,28 @@
                 </a:solidFill>
                 <a:latin typeface="맑은 고딕"/>
               </a:rPr>
-              <a:t>OCIO 전문운용기관 (공개경쟁 선정)</a:t>
-            </a:r>
-          </a:p>
-        </p:txBody>
-      </p:sp>
-      <p:sp>
-        <p:nvSpPr>
-          <p:cNvPr id="20" name="Rectangle 19"/>
-          <p:cNvSpPr/>
-          <p:nvPr/>
-        </p:nvSpPr>
-        <p:spPr>
-          <a:xfrm>
-            <a:off x="365760" y="5029200"/>
-            <a:ext cx="3200400" cy="457200"/>
-          </a:xfrm>
-          <a:prstGeom prst="rect">
-            <a:avLst/>
-          </a:prstGeom>
-          <a:solidFill>
-            <a:srgbClr val="1B5E20"/>
+              <a:t>OCIO 전문운용기관
+(공개경쟁 선정)</a:t>
+            </a:r>
+          </a:p>
+        </p:txBody>
+      </p:sp>
+      <p:sp>
+        <p:nvSpPr>
+          <p:cNvPr id="21" name="Rectangle 20"/>
+          <p:cNvSpPr/>
+          <p:nvPr/>
+        </p:nvSpPr>
+        <p:spPr>
+          <a:xfrm>
+            <a:off x="365760" y="5532120"/>
+            <a:ext cx="5577840" cy="457200"/>
+          </a:xfrm>
+          <a:prstGeom prst="rect">
+            <a:avLst/>
+          </a:prstGeom>
+          <a:solidFill>
+            <a:srgbClr val="00897B"/>
           </a:solidFill>
           <a:ln>
             <a:noFill/>
@@ -7210,14 +7250,14 @@
       </p:sp>
       <p:sp>
         <p:nvSpPr>
-          <p:cNvPr id="21" name="TextBox 20"/>
-          <p:cNvSpPr txBox="1"/>
-          <p:nvPr/>
-        </p:nvSpPr>
-        <p:spPr>
-          <a:xfrm>
-            <a:off x="411480" y="5074920"/>
-            <a:ext cx="3108960" cy="365760"/>
+          <p:cNvPr id="22" name="TextBox 21"/>
+          <p:cNvSpPr txBox="1"/>
+          <p:nvPr/>
+        </p:nvSpPr>
+        <p:spPr>
+          <a:xfrm>
+            <a:off x="411480" y="5559552"/>
+            <a:ext cx="5486400" cy="402336"/>
           </a:xfrm>
           <a:prstGeom prst="rect">
             <a:avLst/>
@@ -7238,27 +7278,152 @@
                 </a:solidFill>
                 <a:latin typeface="맑은 고딕"/>
               </a:rPr>
-              <a:t>특별시의회 보고</a:t>
-            </a:r>
-          </a:p>
-        </p:txBody>
-      </p:sp>
-      <p:sp>
-        <p:nvSpPr>
-          <p:cNvPr id="22" name="Rectangle 21"/>
-          <p:cNvSpPr/>
-          <p:nvPr/>
-        </p:nvSpPr>
-        <p:spPr>
-          <a:xfrm>
-            <a:off x="3749039" y="5029200"/>
-            <a:ext cx="3200400" cy="457200"/>
-          </a:xfrm>
-          <a:prstGeom prst="rect">
-            <a:avLst/>
-          </a:prstGeom>
-          <a:solidFill>
-            <a:srgbClr val="00897B"/>
+              <a:t>외부감사인 · 특별시의회 · 중앙정부/국회 보고</a:t>
+            </a:r>
+          </a:p>
+        </p:txBody>
+      </p:sp>
+      <p:sp>
+        <p:nvSpPr>
+          <p:cNvPr id="23" name="Rectangle 22"/>
+          <p:cNvSpPr/>
+          <p:nvPr/>
+        </p:nvSpPr>
+        <p:spPr>
+          <a:xfrm>
+            <a:off x="6309360" y="1143000"/>
+            <a:ext cx="5577840" cy="4846320"/>
+          </a:xfrm>
+          <a:prstGeom prst="rect">
+            <a:avLst/>
+          </a:prstGeom>
+          <a:solidFill>
+            <a:srgbClr val="F5F5F5"/>
+          </a:solidFill>
+          <a:ln w="19050">
+            <a:solidFill>
+              <a:srgbClr val="1A237E"/>
+            </a:solidFill>
+          </a:ln>
+        </p:spPr>
+        <p:style>
+          <a:lnRef idx="1">
+            <a:schemeClr val="accent1"/>
+          </a:lnRef>
+          <a:fillRef idx="3">
+            <a:schemeClr val="accent1"/>
+          </a:fillRef>
+          <a:effectRef idx="2">
+            <a:schemeClr val="accent1"/>
+          </a:effectRef>
+          <a:fontRef idx="minor">
+            <a:schemeClr val="lt1"/>
+          </a:fontRef>
+        </p:style>
+        <p:txBody>
+          <a:bodyPr rtlCol="0" anchor="ctr"/>
+          <a:lstStyle/>
+          <a:p>
+            <a:pPr algn="ctr"/>
+          </a:p>
+        </p:txBody>
+      </p:sp>
+      <p:sp>
+        <p:nvSpPr>
+          <p:cNvPr id="24" name="TextBox 23"/>
+          <p:cNvSpPr txBox="1"/>
+          <p:nvPr/>
+        </p:nvSpPr>
+        <p:spPr>
+          <a:xfrm>
+            <a:off x="6446520" y="1234440"/>
+            <a:ext cx="5303520" cy="320040"/>
+          </a:xfrm>
+          <a:prstGeom prst="rect">
+            <a:avLst/>
+          </a:prstGeom>
+          <a:noFill/>
+        </p:spPr>
+        <p:txBody>
+          <a:bodyPr wrap="square">
+            <a:spAutoFit/>
+          </a:bodyPr>
+          <a:lstStyle/>
+          <a:p>
+            <a:pPr algn="l"/>
+            <a:r>
+              <a:rPr sz="1400" b="1" i="0">
+                <a:solidFill>
+                  <a:srgbClr val="1A237E"/>
+                </a:solidFill>
+                <a:latin typeface="맑은 고딕"/>
+              </a:rPr>
+              <a:t>■ 10대 정치개입 차단장치</a:t>
+            </a:r>
+          </a:p>
+        </p:txBody>
+      </p:sp>
+      <p:sp>
+        <p:nvSpPr>
+          <p:cNvPr id="25" name="Rectangle 24"/>
+          <p:cNvSpPr/>
+          <p:nvPr/>
+        </p:nvSpPr>
+        <p:spPr>
+          <a:xfrm>
+            <a:off x="6446520" y="1645920"/>
+            <a:ext cx="2606040" cy="768096"/>
+          </a:xfrm>
+          <a:prstGeom prst="rect">
+            <a:avLst/>
+          </a:prstGeom>
+          <a:solidFill>
+            <a:srgbClr val="FFFFFF"/>
+          </a:solidFill>
+          <a:ln w="12700">
+            <a:solidFill>
+              <a:srgbClr val="1565C0"/>
+            </a:solidFill>
+          </a:ln>
+        </p:spPr>
+        <p:style>
+          <a:lnRef idx="1">
+            <a:schemeClr val="accent1"/>
+          </a:lnRef>
+          <a:fillRef idx="3">
+            <a:schemeClr val="accent1"/>
+          </a:fillRef>
+          <a:effectRef idx="2">
+            <a:schemeClr val="accent1"/>
+          </a:effectRef>
+          <a:fontRef idx="minor">
+            <a:schemeClr val="lt1"/>
+          </a:fontRef>
+        </p:style>
+        <p:txBody>
+          <a:bodyPr rtlCol="0" anchor="ctr"/>
+          <a:lstStyle/>
+          <a:p>
+            <a:pPr algn="ctr"/>
+          </a:p>
+        </p:txBody>
+      </p:sp>
+      <p:sp>
+        <p:nvSpPr>
+          <p:cNvPr id="26" name="Rectangle 25"/>
+          <p:cNvSpPr/>
+          <p:nvPr/>
+        </p:nvSpPr>
+        <p:spPr>
+          <a:xfrm>
+            <a:off x="6446520" y="1645920"/>
+            <a:ext cx="411480" cy="768096"/>
+          </a:xfrm>
+          <a:prstGeom prst="rect">
+            <a:avLst/>
+          </a:prstGeom>
+          <a:solidFill>
+            <a:srgbClr val="1565C0"/>
           </a:solidFill>
           <a:ln>
             <a:noFill/>
@@ -7288,55 +7453,170 @@
       </p:sp>
       <p:sp>
         <p:nvSpPr>
-          <p:cNvPr id="23" name="TextBox 22"/>
-          <p:cNvSpPr txBox="1"/>
-          <p:nvPr/>
-        </p:nvSpPr>
-        <p:spPr>
-          <a:xfrm>
-            <a:off x="3794759" y="5074920"/>
-            <a:ext cx="3108960" cy="365760"/>
-          </a:xfrm>
-          <a:prstGeom prst="rect">
-            <a:avLst/>
-          </a:prstGeom>
-          <a:noFill/>
-        </p:spPr>
-        <p:txBody>
-          <a:bodyPr wrap="square">
-            <a:spAutoFit/>
-          </a:bodyPr>
-          <a:lstStyle/>
-          <a:p>
-            <a:pPr algn="ctr"/>
+          <p:cNvPr id="27" name="TextBox 26"/>
+          <p:cNvSpPr txBox="1"/>
+          <p:nvPr/>
+        </p:nvSpPr>
+        <p:spPr>
+          <a:xfrm>
+            <a:off x="6446520" y="1837944"/>
+            <a:ext cx="411480" cy="384048"/>
+          </a:xfrm>
+          <a:prstGeom prst="rect">
+            <a:avLst/>
+          </a:prstGeom>
+          <a:noFill/>
+        </p:spPr>
+        <p:txBody>
+          <a:bodyPr wrap="square">
+            <a:spAutoFit/>
+          </a:bodyPr>
+          <a:lstStyle/>
+          <a:p>
+            <a:pPr algn="ctr"/>
+            <a:r>
+              <a:rPr sz="1600" b="1" i="0">
+                <a:solidFill>
+                  <a:srgbClr val="FFFFFF"/>
+                </a:solidFill>
+                <a:latin typeface="맑은 고딕"/>
+              </a:rPr>
+              <a:t>①</a:t>
+            </a:r>
+          </a:p>
+        </p:txBody>
+      </p:sp>
+      <p:sp>
+        <p:nvSpPr>
+          <p:cNvPr id="28" name="TextBox 27"/>
+          <p:cNvSpPr txBox="1"/>
+          <p:nvPr/>
+        </p:nvSpPr>
+        <p:spPr>
+          <a:xfrm>
+            <a:off x="6922008" y="1700784"/>
+            <a:ext cx="2084831" cy="329184"/>
+          </a:xfrm>
+          <a:prstGeom prst="rect">
+            <a:avLst/>
+          </a:prstGeom>
+          <a:noFill/>
+        </p:spPr>
+        <p:txBody>
+          <a:bodyPr wrap="square">
+            <a:spAutoFit/>
+          </a:bodyPr>
+          <a:lstStyle/>
+          <a:p>
+            <a:pPr algn="l"/>
             <a:r>
               <a:rPr sz="1100" b="1" i="0">
                 <a:solidFill>
-                  <a:srgbClr val="FFFFFF"/>
-                </a:solidFill>
-                <a:latin typeface="맑은 고딕"/>
-              </a:rPr>
-              <a:t>외부감사인</a:t>
-            </a:r>
-          </a:p>
-        </p:txBody>
-      </p:sp>
-      <p:sp>
-        <p:nvSpPr>
-          <p:cNvPr id="24" name="Rectangle 23"/>
-          <p:cNvSpPr/>
-          <p:nvPr/>
-        </p:nvSpPr>
-        <p:spPr>
-          <a:xfrm>
-            <a:off x="7132320" y="5029200"/>
-            <a:ext cx="4114800" cy="457200"/>
-          </a:xfrm>
-          <a:prstGeom prst="rect">
-            <a:avLst/>
-          </a:prstGeom>
-          <a:solidFill>
-            <a:srgbClr val="1A237E"/>
+                  <a:srgbClr val="1565C0"/>
+                </a:solidFill>
+                <a:latin typeface="맑은 고딕"/>
+              </a:rPr>
+              <a:t>투자정책서 사전공시</a:t>
+            </a:r>
+          </a:p>
+        </p:txBody>
+      </p:sp>
+      <p:sp>
+        <p:nvSpPr>
+          <p:cNvPr id="29" name="TextBox 28"/>
+          <p:cNvSpPr txBox="1"/>
+          <p:nvPr/>
+        </p:nvSpPr>
+        <p:spPr>
+          <a:xfrm>
+            <a:off x="6922008" y="2029968"/>
+            <a:ext cx="2084831" cy="365760"/>
+          </a:xfrm>
+          <a:prstGeom prst="rect">
+            <a:avLst/>
+          </a:prstGeom>
+          <a:noFill/>
+        </p:spPr>
+        <p:txBody>
+          <a:bodyPr wrap="square">
+            <a:spAutoFit/>
+          </a:bodyPr>
+          <a:lstStyle/>
+          <a:p>
+            <a:pPr algn="l"/>
+            <a:r>
+              <a:rPr sz="850" b="0" i="0">
+                <a:solidFill>
+                  <a:srgbClr val="757575"/>
+                </a:solidFill>
+                <a:latin typeface="맑은 고딕"/>
+              </a:rPr>
+              <a:t>운용 규칙 사전 공개 → 사후 변경 차단</a:t>
+            </a:r>
+          </a:p>
+        </p:txBody>
+      </p:sp>
+      <p:sp>
+        <p:nvSpPr>
+          <p:cNvPr id="30" name="Rectangle 29"/>
+          <p:cNvSpPr/>
+          <p:nvPr/>
+        </p:nvSpPr>
+        <p:spPr>
+          <a:xfrm>
+            <a:off x="6446520" y="2487168"/>
+            <a:ext cx="2606040" cy="768096"/>
+          </a:xfrm>
+          <a:prstGeom prst="rect">
+            <a:avLst/>
+          </a:prstGeom>
+          <a:solidFill>
+            <a:srgbClr val="FFFFFF"/>
+          </a:solidFill>
+          <a:ln w="12700">
+            <a:solidFill>
+              <a:srgbClr val="1565C0"/>
+            </a:solidFill>
+          </a:ln>
+        </p:spPr>
+        <p:style>
+          <a:lnRef idx="1">
+            <a:schemeClr val="accent1"/>
+          </a:lnRef>
+          <a:fillRef idx="3">
+            <a:schemeClr val="accent1"/>
+          </a:fillRef>
+          <a:effectRef idx="2">
+            <a:schemeClr val="accent1"/>
+          </a:effectRef>
+          <a:fontRef idx="minor">
+            <a:schemeClr val="lt1"/>
+          </a:fontRef>
+        </p:style>
+        <p:txBody>
+          <a:bodyPr rtlCol="0" anchor="ctr"/>
+          <a:lstStyle/>
+          <a:p>
+            <a:pPr algn="ctr"/>
+          </a:p>
+        </p:txBody>
+      </p:sp>
+      <p:sp>
+        <p:nvSpPr>
+          <p:cNvPr id="31" name="Rectangle 30"/>
+          <p:cNvSpPr/>
+          <p:nvPr/>
+        </p:nvSpPr>
+        <p:spPr>
+          <a:xfrm>
+            <a:off x="6446520" y="2487168"/>
+            <a:ext cx="411480" cy="768096"/>
+          </a:xfrm>
+          <a:prstGeom prst="rect">
+            <a:avLst/>
+          </a:prstGeom>
+          <a:solidFill>
+            <a:srgbClr val="1565C0"/>
           </a:solidFill>
           <a:ln>
             <a:noFill/>
@@ -7366,49 +7646,84 @@
       </p:sp>
       <p:sp>
         <p:nvSpPr>
-          <p:cNvPr id="25" name="TextBox 24"/>
-          <p:cNvSpPr txBox="1"/>
-          <p:nvPr/>
-        </p:nvSpPr>
-        <p:spPr>
-          <a:xfrm>
-            <a:off x="7178040" y="5074920"/>
-            <a:ext cx="4023360" cy="365760"/>
-          </a:xfrm>
-          <a:prstGeom prst="rect">
-            <a:avLst/>
-          </a:prstGeom>
-          <a:noFill/>
-        </p:spPr>
-        <p:txBody>
-          <a:bodyPr wrap="square">
-            <a:spAutoFit/>
-          </a:bodyPr>
-          <a:lstStyle/>
-          <a:p>
-            <a:pPr algn="ctr"/>
+          <p:cNvPr id="32" name="TextBox 31"/>
+          <p:cNvSpPr txBox="1"/>
+          <p:nvPr/>
+        </p:nvSpPr>
+        <p:spPr>
+          <a:xfrm>
+            <a:off x="6446520" y="2679192"/>
+            <a:ext cx="411480" cy="384048"/>
+          </a:xfrm>
+          <a:prstGeom prst="rect">
+            <a:avLst/>
+          </a:prstGeom>
+          <a:noFill/>
+        </p:spPr>
+        <p:txBody>
+          <a:bodyPr wrap="square">
+            <a:spAutoFit/>
+          </a:bodyPr>
+          <a:lstStyle/>
+          <a:p>
+            <a:pPr algn="ctr"/>
+            <a:r>
+              <a:rPr sz="1600" b="1" i="0">
+                <a:solidFill>
+                  <a:srgbClr val="FFFFFF"/>
+                </a:solidFill>
+                <a:latin typeface="맑은 고딕"/>
+              </a:rPr>
+              <a:t>②</a:t>
+            </a:r>
+          </a:p>
+        </p:txBody>
+      </p:sp>
+      <p:sp>
+        <p:nvSpPr>
+          <p:cNvPr id="33" name="TextBox 32"/>
+          <p:cNvSpPr txBox="1"/>
+          <p:nvPr/>
+        </p:nvSpPr>
+        <p:spPr>
+          <a:xfrm>
+            <a:off x="6922008" y="2542032"/>
+            <a:ext cx="2084831" cy="329184"/>
+          </a:xfrm>
+          <a:prstGeom prst="rect">
+            <a:avLst/>
+          </a:prstGeom>
+          <a:noFill/>
+        </p:spPr>
+        <p:txBody>
+          <a:bodyPr wrap="square">
+            <a:spAutoFit/>
+          </a:bodyPr>
+          <a:lstStyle/>
+          <a:p>
+            <a:pPr algn="l"/>
             <a:r>
               <a:rPr sz="1100" b="1" i="0">
                 <a:solidFill>
-                  <a:srgbClr val="FFFFFF"/>
-                </a:solidFill>
-                <a:latin typeface="맑은 고딕"/>
-              </a:rPr>
-              <a:t>중앙정부·국회 보고</a:t>
-            </a:r>
-          </a:p>
-        </p:txBody>
-      </p:sp>
-      <p:sp>
-        <p:nvSpPr>
-          <p:cNvPr id="26" name="TextBox 25"/>
-          <p:cNvSpPr txBox="1"/>
-          <p:nvPr/>
-        </p:nvSpPr>
-        <p:spPr>
-          <a:xfrm>
-            <a:off x="274320" y="5669280"/>
-            <a:ext cx="5486400" cy="320040"/>
+                  <a:srgbClr val="1565C0"/>
+                </a:solidFill>
+                <a:latin typeface="맑은 고딕"/>
+              </a:rPr>
+              <a:t>자산군별 허용범위 고정</a:t>
+            </a:r>
+          </a:p>
+        </p:txBody>
+      </p:sp>
+      <p:sp>
+        <p:nvSpPr>
+          <p:cNvPr id="34" name="TextBox 33"/>
+          <p:cNvSpPr txBox="1"/>
+          <p:nvPr/>
+        </p:nvSpPr>
+        <p:spPr>
+          <a:xfrm>
+            <a:off x="6922008" y="2871216"/>
+            <a:ext cx="2084831" cy="365760"/>
           </a:xfrm>
           <a:prstGeom prst="rect">
             <a:avLst/>
@@ -7423,33 +7738,78 @@
           <a:p>
             <a:pPr algn="l"/>
             <a:r>
-              <a:rPr sz="1200" b="1" i="0">
-                <a:solidFill>
-                  <a:srgbClr val="1A237E"/>
-                </a:solidFill>
-                <a:latin typeface="맑은 고딕"/>
-              </a:rPr>
-              <a:t>■ 10대 정치개입 차단장치</a:t>
-            </a:r>
-          </a:p>
-        </p:txBody>
-      </p:sp>
-      <p:sp>
-        <p:nvSpPr>
-          <p:cNvPr id="27" name="Rectangle 26"/>
-          <p:cNvSpPr/>
-          <p:nvPr/>
-        </p:nvSpPr>
-        <p:spPr>
-          <a:xfrm>
-            <a:off x="274320" y="5989320"/>
-            <a:ext cx="2194560" cy="292608"/>
-          </a:xfrm>
-          <a:prstGeom prst="rect">
-            <a:avLst/>
-          </a:prstGeom>
-          <a:solidFill>
-            <a:srgbClr val="1A237E"/>
+              <a:rPr sz="850" b="0" i="0">
+                <a:solidFill>
+                  <a:srgbClr val="757575"/>
+                </a:solidFill>
+                <a:latin typeface="맑은 고딕"/>
+              </a:rPr>
+              <a:t>±범위 내에서만 조정 → 임의 변경 불가</a:t>
+            </a:r>
+          </a:p>
+        </p:txBody>
+      </p:sp>
+      <p:sp>
+        <p:nvSpPr>
+          <p:cNvPr id="35" name="Rectangle 34"/>
+          <p:cNvSpPr/>
+          <p:nvPr/>
+        </p:nvSpPr>
+        <p:spPr>
+          <a:xfrm>
+            <a:off x="6446520" y="3328416"/>
+            <a:ext cx="2606040" cy="768096"/>
+          </a:xfrm>
+          <a:prstGeom prst="rect">
+            <a:avLst/>
+          </a:prstGeom>
+          <a:solidFill>
+            <a:srgbClr val="FFFFFF"/>
+          </a:solidFill>
+          <a:ln w="12700">
+            <a:solidFill>
+              <a:srgbClr val="1565C0"/>
+            </a:solidFill>
+          </a:ln>
+        </p:spPr>
+        <p:style>
+          <a:lnRef idx="1">
+            <a:schemeClr val="accent1"/>
+          </a:lnRef>
+          <a:fillRef idx="3">
+            <a:schemeClr val="accent1"/>
+          </a:fillRef>
+          <a:effectRef idx="2">
+            <a:schemeClr val="accent1"/>
+          </a:effectRef>
+          <a:fontRef idx="minor">
+            <a:schemeClr val="lt1"/>
+          </a:fontRef>
+        </p:style>
+        <p:txBody>
+          <a:bodyPr rtlCol="0" anchor="ctr"/>
+          <a:lstStyle/>
+          <a:p>
+            <a:pPr algn="ctr"/>
+          </a:p>
+        </p:txBody>
+      </p:sp>
+      <p:sp>
+        <p:nvSpPr>
+          <p:cNvPr id="36" name="Rectangle 35"/>
+          <p:cNvSpPr/>
+          <p:nvPr/>
+        </p:nvSpPr>
+        <p:spPr>
+          <a:xfrm>
+            <a:off x="6446520" y="3328416"/>
+            <a:ext cx="411480" cy="768096"/>
+          </a:xfrm>
+          <a:prstGeom prst="rect">
+            <a:avLst/>
+          </a:prstGeom>
+          <a:solidFill>
+            <a:srgbClr val="1565C0"/>
           </a:solidFill>
           <a:ln>
             <a:noFill/>
@@ -7479,55 +7839,170 @@
       </p:sp>
       <p:sp>
         <p:nvSpPr>
-          <p:cNvPr id="28" name="TextBox 27"/>
-          <p:cNvSpPr txBox="1"/>
-          <p:nvPr/>
-        </p:nvSpPr>
-        <p:spPr>
-          <a:xfrm>
-            <a:off x="320040" y="6007608"/>
-            <a:ext cx="2103120" cy="256032"/>
-          </a:xfrm>
-          <a:prstGeom prst="rect">
-            <a:avLst/>
-          </a:prstGeom>
-          <a:noFill/>
-        </p:spPr>
-        <p:txBody>
-          <a:bodyPr wrap="square">
-            <a:spAutoFit/>
-          </a:bodyPr>
-          <a:lstStyle/>
-          <a:p>
-            <a:pPr algn="ctr"/>
-            <a:r>
-              <a:rPr sz="900" b="0" i="0">
+          <p:cNvPr id="37" name="TextBox 36"/>
+          <p:cNvSpPr txBox="1"/>
+          <p:nvPr/>
+        </p:nvSpPr>
+        <p:spPr>
+          <a:xfrm>
+            <a:off x="6446520" y="3520440"/>
+            <a:ext cx="411480" cy="384048"/>
+          </a:xfrm>
+          <a:prstGeom prst="rect">
+            <a:avLst/>
+          </a:prstGeom>
+          <a:noFill/>
+        </p:spPr>
+        <p:txBody>
+          <a:bodyPr wrap="square">
+            <a:spAutoFit/>
+          </a:bodyPr>
+          <a:lstStyle/>
+          <a:p>
+            <a:pPr algn="ctr"/>
+            <a:r>
+              <a:rPr sz="1600" b="1" i="0">
                 <a:solidFill>
                   <a:srgbClr val="FFFFFF"/>
                 </a:solidFill>
                 <a:latin typeface="맑은 고딕"/>
               </a:rPr>
-              <a:t>① 투자정책서 사전공시</a:t>
-            </a:r>
-          </a:p>
-        </p:txBody>
-      </p:sp>
-      <p:sp>
-        <p:nvSpPr>
-          <p:cNvPr id="29" name="Rectangle 28"/>
-          <p:cNvSpPr/>
-          <p:nvPr/>
-        </p:nvSpPr>
-        <p:spPr>
-          <a:xfrm>
-            <a:off x="2651760" y="5989320"/>
-            <a:ext cx="2194560" cy="292608"/>
-          </a:xfrm>
-          <a:prstGeom prst="rect">
-            <a:avLst/>
-          </a:prstGeom>
-          <a:solidFill>
-            <a:srgbClr val="1A237E"/>
+              <a:t>③</a:t>
+            </a:r>
+          </a:p>
+        </p:txBody>
+      </p:sp>
+      <p:sp>
+        <p:nvSpPr>
+          <p:cNvPr id="38" name="TextBox 37"/>
+          <p:cNvSpPr txBox="1"/>
+          <p:nvPr/>
+        </p:nvSpPr>
+        <p:spPr>
+          <a:xfrm>
+            <a:off x="6922008" y="3383280"/>
+            <a:ext cx="2084831" cy="329184"/>
+          </a:xfrm>
+          <a:prstGeom prst="rect">
+            <a:avLst/>
+          </a:prstGeom>
+          <a:noFill/>
+        </p:spPr>
+        <p:txBody>
+          <a:bodyPr wrap="square">
+            <a:spAutoFit/>
+          </a:bodyPr>
+          <a:lstStyle/>
+          <a:p>
+            <a:pPr algn="l"/>
+            <a:r>
+              <a:rPr sz="1100" b="1" i="0">
+                <a:solidFill>
+                  <a:srgbClr val="1565C0"/>
+                </a:solidFill>
+                <a:latin typeface="맑은 고딕"/>
+              </a:rPr>
+              <a:t>특정기업 직접투자 금지</a:t>
+            </a:r>
+          </a:p>
+        </p:txBody>
+      </p:sp>
+      <p:sp>
+        <p:nvSpPr>
+          <p:cNvPr id="39" name="TextBox 38"/>
+          <p:cNvSpPr txBox="1"/>
+          <p:nvPr/>
+        </p:nvSpPr>
+        <p:spPr>
+          <a:xfrm>
+            <a:off x="6922008" y="3712464"/>
+            <a:ext cx="2084831" cy="365760"/>
+          </a:xfrm>
+          <a:prstGeom prst="rect">
+            <a:avLst/>
+          </a:prstGeom>
+          <a:noFill/>
+        </p:spPr>
+        <p:txBody>
+          <a:bodyPr wrap="square">
+            <a:spAutoFit/>
+          </a:bodyPr>
+          <a:lstStyle/>
+          <a:p>
+            <a:pPr algn="l"/>
+            <a:r>
+              <a:rPr sz="850" b="0" i="0">
+                <a:solidFill>
+                  <a:srgbClr val="757575"/>
+                </a:solidFill>
+                <a:latin typeface="맑은 고딕"/>
+              </a:rPr>
+              <a:t>개별 기업 직접매수 원칙 금지</a:t>
+            </a:r>
+          </a:p>
+        </p:txBody>
+      </p:sp>
+      <p:sp>
+        <p:nvSpPr>
+          <p:cNvPr id="40" name="Rectangle 39"/>
+          <p:cNvSpPr/>
+          <p:nvPr/>
+        </p:nvSpPr>
+        <p:spPr>
+          <a:xfrm>
+            <a:off x="6446520" y="4169664"/>
+            <a:ext cx="2606040" cy="768096"/>
+          </a:xfrm>
+          <a:prstGeom prst="rect">
+            <a:avLst/>
+          </a:prstGeom>
+          <a:solidFill>
+            <a:srgbClr val="FFFFFF"/>
+          </a:solidFill>
+          <a:ln w="12700">
+            <a:solidFill>
+              <a:srgbClr val="1565C0"/>
+            </a:solidFill>
+          </a:ln>
+        </p:spPr>
+        <p:style>
+          <a:lnRef idx="1">
+            <a:schemeClr val="accent1"/>
+          </a:lnRef>
+          <a:fillRef idx="3">
+            <a:schemeClr val="accent1"/>
+          </a:fillRef>
+          <a:effectRef idx="2">
+            <a:schemeClr val="accent1"/>
+          </a:effectRef>
+          <a:fontRef idx="minor">
+            <a:schemeClr val="lt1"/>
+          </a:fontRef>
+        </p:style>
+        <p:txBody>
+          <a:bodyPr rtlCol="0" anchor="ctr"/>
+          <a:lstStyle/>
+          <a:p>
+            <a:pPr algn="ctr"/>
+          </a:p>
+        </p:txBody>
+      </p:sp>
+      <p:sp>
+        <p:nvSpPr>
+          <p:cNvPr id="41" name="Rectangle 40"/>
+          <p:cNvSpPr/>
+          <p:nvPr/>
+        </p:nvSpPr>
+        <p:spPr>
+          <a:xfrm>
+            <a:off x="6446520" y="4169664"/>
+            <a:ext cx="411480" cy="768096"/>
+          </a:xfrm>
+          <a:prstGeom prst="rect">
+            <a:avLst/>
+          </a:prstGeom>
+          <a:solidFill>
+            <a:srgbClr val="1565C0"/>
           </a:solidFill>
           <a:ln>
             <a:noFill/>
@@ -7557,55 +8032,170 @@
       </p:sp>
       <p:sp>
         <p:nvSpPr>
-          <p:cNvPr id="30" name="TextBox 29"/>
-          <p:cNvSpPr txBox="1"/>
-          <p:nvPr/>
-        </p:nvSpPr>
-        <p:spPr>
-          <a:xfrm>
-            <a:off x="2697479" y="6007608"/>
-            <a:ext cx="2103120" cy="256032"/>
-          </a:xfrm>
-          <a:prstGeom prst="rect">
-            <a:avLst/>
-          </a:prstGeom>
-          <a:noFill/>
-        </p:spPr>
-        <p:txBody>
-          <a:bodyPr wrap="square">
-            <a:spAutoFit/>
-          </a:bodyPr>
-          <a:lstStyle/>
-          <a:p>
-            <a:pPr algn="ctr"/>
-            <a:r>
-              <a:rPr sz="900" b="0" i="0">
+          <p:cNvPr id="42" name="TextBox 41"/>
+          <p:cNvSpPr txBox="1"/>
+          <p:nvPr/>
+        </p:nvSpPr>
+        <p:spPr>
+          <a:xfrm>
+            <a:off x="6446520" y="4361688"/>
+            <a:ext cx="411480" cy="384048"/>
+          </a:xfrm>
+          <a:prstGeom prst="rect">
+            <a:avLst/>
+          </a:prstGeom>
+          <a:noFill/>
+        </p:spPr>
+        <p:txBody>
+          <a:bodyPr wrap="square">
+            <a:spAutoFit/>
+          </a:bodyPr>
+          <a:lstStyle/>
+          <a:p>
+            <a:pPr algn="ctr"/>
+            <a:r>
+              <a:rPr sz="1600" b="1" i="0">
                 <a:solidFill>
                   <a:srgbClr val="FFFFFF"/>
                 </a:solidFill>
                 <a:latin typeface="맑은 고딕"/>
               </a:rPr>
-              <a:t>② 자산군 허용범위 고정</a:t>
-            </a:r>
-          </a:p>
-        </p:txBody>
-      </p:sp>
-      <p:sp>
-        <p:nvSpPr>
-          <p:cNvPr id="31" name="Rectangle 30"/>
-          <p:cNvSpPr/>
-          <p:nvPr/>
-        </p:nvSpPr>
-        <p:spPr>
-          <a:xfrm>
-            <a:off x="5029200" y="5989320"/>
-            <a:ext cx="2194560" cy="292608"/>
-          </a:xfrm>
-          <a:prstGeom prst="rect">
-            <a:avLst/>
-          </a:prstGeom>
-          <a:solidFill>
-            <a:srgbClr val="1A237E"/>
+              <a:t>④</a:t>
+            </a:r>
+          </a:p>
+        </p:txBody>
+      </p:sp>
+      <p:sp>
+        <p:nvSpPr>
+          <p:cNvPr id="43" name="TextBox 42"/>
+          <p:cNvSpPr txBox="1"/>
+          <p:nvPr/>
+        </p:nvSpPr>
+        <p:spPr>
+          <a:xfrm>
+            <a:off x="6922008" y="4224528"/>
+            <a:ext cx="2084831" cy="329184"/>
+          </a:xfrm>
+          <a:prstGeom prst="rect">
+            <a:avLst/>
+          </a:prstGeom>
+          <a:noFill/>
+        </p:spPr>
+        <p:txBody>
+          <a:bodyPr wrap="square">
+            <a:spAutoFit/>
+          </a:bodyPr>
+          <a:lstStyle/>
+          <a:p>
+            <a:pPr algn="l"/>
+            <a:r>
+              <a:rPr sz="1100" b="1" i="0">
+                <a:solidFill>
+                  <a:srgbClr val="1565C0"/>
+                </a:solidFill>
+                <a:latin typeface="맑은 고딕"/>
+              </a:rPr>
+              <a:t>지역전략투자 별도 심사</a:t>
+            </a:r>
+          </a:p>
+        </p:txBody>
+      </p:sp>
+      <p:sp>
+        <p:nvSpPr>
+          <p:cNvPr id="44" name="TextBox 43"/>
+          <p:cNvSpPr txBox="1"/>
+          <p:nvPr/>
+        </p:nvSpPr>
+        <p:spPr>
+          <a:xfrm>
+            <a:off x="6922008" y="4553712"/>
+            <a:ext cx="2084831" cy="365760"/>
+          </a:xfrm>
+          <a:prstGeom prst="rect">
+            <a:avLst/>
+          </a:prstGeom>
+          <a:noFill/>
+        </p:spPr>
+        <p:txBody>
+          <a:bodyPr wrap="square">
+            <a:spAutoFit/>
+          </a:bodyPr>
+          <a:lstStyle/>
+          <a:p>
+            <a:pPr algn="l"/>
+            <a:r>
+              <a:rPr sz="850" b="0" i="0">
+                <a:solidFill>
+                  <a:srgbClr val="757575"/>
+                </a:solidFill>
+                <a:latin typeface="맑은 고딕"/>
+              </a:rPr>
+              <a:t>위원회 심사 없이 지역투자 불가</a:t>
+            </a:r>
+          </a:p>
+        </p:txBody>
+      </p:sp>
+      <p:sp>
+        <p:nvSpPr>
+          <p:cNvPr id="45" name="Rectangle 44"/>
+          <p:cNvSpPr/>
+          <p:nvPr/>
+        </p:nvSpPr>
+        <p:spPr>
+          <a:xfrm>
+            <a:off x="6446520" y="5010912"/>
+            <a:ext cx="2606040" cy="768096"/>
+          </a:xfrm>
+          <a:prstGeom prst="rect">
+            <a:avLst/>
+          </a:prstGeom>
+          <a:solidFill>
+            <a:srgbClr val="FFFFFF"/>
+          </a:solidFill>
+          <a:ln w="12700">
+            <a:solidFill>
+              <a:srgbClr val="1565C0"/>
+            </a:solidFill>
+          </a:ln>
+        </p:spPr>
+        <p:style>
+          <a:lnRef idx="1">
+            <a:schemeClr val="accent1"/>
+          </a:lnRef>
+          <a:fillRef idx="3">
+            <a:schemeClr val="accent1"/>
+          </a:fillRef>
+          <a:effectRef idx="2">
+            <a:schemeClr val="accent1"/>
+          </a:effectRef>
+          <a:fontRef idx="minor">
+            <a:schemeClr val="lt1"/>
+          </a:fontRef>
+        </p:style>
+        <p:txBody>
+          <a:bodyPr rtlCol="0" anchor="ctr"/>
+          <a:lstStyle/>
+          <a:p>
+            <a:pPr algn="ctr"/>
+          </a:p>
+        </p:txBody>
+      </p:sp>
+      <p:sp>
+        <p:nvSpPr>
+          <p:cNvPr id="46" name="Rectangle 45"/>
+          <p:cNvSpPr/>
+          <p:nvPr/>
+        </p:nvSpPr>
+        <p:spPr>
+          <a:xfrm>
+            <a:off x="6446520" y="5010912"/>
+            <a:ext cx="411480" cy="768096"/>
+          </a:xfrm>
+          <a:prstGeom prst="rect">
+            <a:avLst/>
+          </a:prstGeom>
+          <a:solidFill>
+            <a:srgbClr val="1565C0"/>
           </a:solidFill>
           <a:ln>
             <a:noFill/>
@@ -7635,55 +8225,170 @@
       </p:sp>
       <p:sp>
         <p:nvSpPr>
-          <p:cNvPr id="32" name="TextBox 31"/>
-          <p:cNvSpPr txBox="1"/>
-          <p:nvPr/>
-        </p:nvSpPr>
-        <p:spPr>
-          <a:xfrm>
-            <a:off x="5074920" y="6007608"/>
-            <a:ext cx="2103120" cy="256032"/>
-          </a:xfrm>
-          <a:prstGeom prst="rect">
-            <a:avLst/>
-          </a:prstGeom>
-          <a:noFill/>
-        </p:spPr>
-        <p:txBody>
-          <a:bodyPr wrap="square">
-            <a:spAutoFit/>
-          </a:bodyPr>
-          <a:lstStyle/>
-          <a:p>
-            <a:pPr algn="ctr"/>
-            <a:r>
-              <a:rPr sz="900" b="0" i="0">
+          <p:cNvPr id="47" name="TextBox 46"/>
+          <p:cNvSpPr txBox="1"/>
+          <p:nvPr/>
+        </p:nvSpPr>
+        <p:spPr>
+          <a:xfrm>
+            <a:off x="6446520" y="5202936"/>
+            <a:ext cx="411480" cy="384048"/>
+          </a:xfrm>
+          <a:prstGeom prst="rect">
+            <a:avLst/>
+          </a:prstGeom>
+          <a:noFill/>
+        </p:spPr>
+        <p:txBody>
+          <a:bodyPr wrap="square">
+            <a:spAutoFit/>
+          </a:bodyPr>
+          <a:lstStyle/>
+          <a:p>
+            <a:pPr algn="ctr"/>
+            <a:r>
+              <a:rPr sz="1600" b="1" i="0">
                 <a:solidFill>
                   <a:srgbClr val="FFFFFF"/>
                 </a:solidFill>
                 <a:latin typeface="맑은 고딕"/>
               </a:rPr>
-              <a:t>③ 특정기업 직접투자 금지</a:t>
-            </a:r>
-          </a:p>
-        </p:txBody>
-      </p:sp>
-      <p:sp>
-        <p:nvSpPr>
-          <p:cNvPr id="33" name="Rectangle 32"/>
-          <p:cNvSpPr/>
-          <p:nvPr/>
-        </p:nvSpPr>
-        <p:spPr>
-          <a:xfrm>
-            <a:off x="7406640" y="5989320"/>
-            <a:ext cx="2194560" cy="292608"/>
-          </a:xfrm>
-          <a:prstGeom prst="rect">
-            <a:avLst/>
-          </a:prstGeom>
-          <a:solidFill>
-            <a:srgbClr val="1A237E"/>
+              <a:t>⑤</a:t>
+            </a:r>
+          </a:p>
+        </p:txBody>
+      </p:sp>
+      <p:sp>
+        <p:nvSpPr>
+          <p:cNvPr id="48" name="TextBox 47"/>
+          <p:cNvSpPr txBox="1"/>
+          <p:nvPr/>
+        </p:nvSpPr>
+        <p:spPr>
+          <a:xfrm>
+            <a:off x="6922008" y="5065776"/>
+            <a:ext cx="2084831" cy="329184"/>
+          </a:xfrm>
+          <a:prstGeom prst="rect">
+            <a:avLst/>
+          </a:prstGeom>
+          <a:noFill/>
+        </p:spPr>
+        <p:txBody>
+          <a:bodyPr wrap="square">
+            <a:spAutoFit/>
+          </a:bodyPr>
+          <a:lstStyle/>
+          <a:p>
+            <a:pPr algn="l"/>
+            <a:r>
+              <a:rPr sz="1100" b="1" i="0">
+                <a:solidFill>
+                  <a:srgbClr val="1565C0"/>
+                </a:solidFill>
+                <a:latin typeface="맑은 고딕"/>
+              </a:rPr>
+              <a:t>위원명단·회의록 공개</a:t>
+            </a:r>
+          </a:p>
+        </p:txBody>
+      </p:sp>
+      <p:sp>
+        <p:nvSpPr>
+          <p:cNvPr id="49" name="TextBox 48"/>
+          <p:cNvSpPr txBox="1"/>
+          <p:nvPr/>
+        </p:nvSpPr>
+        <p:spPr>
+          <a:xfrm>
+            <a:off x="6922008" y="5394960"/>
+            <a:ext cx="2084831" cy="365760"/>
+          </a:xfrm>
+          <a:prstGeom prst="rect">
+            <a:avLst/>
+          </a:prstGeom>
+          <a:noFill/>
+        </p:spPr>
+        <p:txBody>
+          <a:bodyPr wrap="square">
+            <a:spAutoFit/>
+          </a:bodyPr>
+          <a:lstStyle/>
+          <a:p>
+            <a:pPr algn="l"/>
+            <a:r>
+              <a:rPr sz="850" b="0" i="0">
+                <a:solidFill>
+                  <a:srgbClr val="757575"/>
+                </a:solidFill>
+                <a:latin typeface="맑은 고딕"/>
+              </a:rPr>
+              <a:t>의사결정 과정 전면 투명화</a:t>
+            </a:r>
+          </a:p>
+        </p:txBody>
+      </p:sp>
+      <p:sp>
+        <p:nvSpPr>
+          <p:cNvPr id="50" name="Rectangle 49"/>
+          <p:cNvSpPr/>
+          <p:nvPr/>
+        </p:nvSpPr>
+        <p:spPr>
+          <a:xfrm>
+            <a:off x="9189720" y="1645920"/>
+            <a:ext cx="2606040" cy="768096"/>
+          </a:xfrm>
+          <a:prstGeom prst="rect">
+            <a:avLst/>
+          </a:prstGeom>
+          <a:solidFill>
+            <a:srgbClr val="FFFFFF"/>
+          </a:solidFill>
+          <a:ln w="12700">
+            <a:solidFill>
+              <a:srgbClr val="1B5E20"/>
+            </a:solidFill>
+          </a:ln>
+        </p:spPr>
+        <p:style>
+          <a:lnRef idx="1">
+            <a:schemeClr val="accent1"/>
+          </a:lnRef>
+          <a:fillRef idx="3">
+            <a:schemeClr val="accent1"/>
+          </a:fillRef>
+          <a:effectRef idx="2">
+            <a:schemeClr val="accent1"/>
+          </a:effectRef>
+          <a:fontRef idx="minor">
+            <a:schemeClr val="lt1"/>
+          </a:fontRef>
+        </p:style>
+        <p:txBody>
+          <a:bodyPr rtlCol="0" anchor="ctr"/>
+          <a:lstStyle/>
+          <a:p>
+            <a:pPr algn="ctr"/>
+          </a:p>
+        </p:txBody>
+      </p:sp>
+      <p:sp>
+        <p:nvSpPr>
+          <p:cNvPr id="51" name="Rectangle 50"/>
+          <p:cNvSpPr/>
+          <p:nvPr/>
+        </p:nvSpPr>
+        <p:spPr>
+          <a:xfrm>
+            <a:off x="9189720" y="1645920"/>
+            <a:ext cx="411480" cy="768096"/>
+          </a:xfrm>
+          <a:prstGeom prst="rect">
+            <a:avLst/>
+          </a:prstGeom>
+          <a:solidFill>
+            <a:srgbClr val="1B5E20"/>
           </a:solidFill>
           <a:ln>
             <a:noFill/>
@@ -7713,55 +8418,170 @@
       </p:sp>
       <p:sp>
         <p:nvSpPr>
-          <p:cNvPr id="34" name="TextBox 33"/>
-          <p:cNvSpPr txBox="1"/>
-          <p:nvPr/>
-        </p:nvSpPr>
-        <p:spPr>
-          <a:xfrm>
-            <a:off x="7452360" y="6007608"/>
-            <a:ext cx="2103120" cy="256032"/>
-          </a:xfrm>
-          <a:prstGeom prst="rect">
-            <a:avLst/>
-          </a:prstGeom>
-          <a:noFill/>
-        </p:spPr>
-        <p:txBody>
-          <a:bodyPr wrap="square">
-            <a:spAutoFit/>
-          </a:bodyPr>
-          <a:lstStyle/>
-          <a:p>
-            <a:pPr algn="ctr"/>
-            <a:r>
-              <a:rPr sz="900" b="0" i="0">
+          <p:cNvPr id="52" name="TextBox 51"/>
+          <p:cNvSpPr txBox="1"/>
+          <p:nvPr/>
+        </p:nvSpPr>
+        <p:spPr>
+          <a:xfrm>
+            <a:off x="9189720" y="1837944"/>
+            <a:ext cx="411480" cy="384048"/>
+          </a:xfrm>
+          <a:prstGeom prst="rect">
+            <a:avLst/>
+          </a:prstGeom>
+          <a:noFill/>
+        </p:spPr>
+        <p:txBody>
+          <a:bodyPr wrap="square">
+            <a:spAutoFit/>
+          </a:bodyPr>
+          <a:lstStyle/>
+          <a:p>
+            <a:pPr algn="ctr"/>
+            <a:r>
+              <a:rPr sz="1600" b="1" i="0">
                 <a:solidFill>
                   <a:srgbClr val="FFFFFF"/>
                 </a:solidFill>
                 <a:latin typeface="맑은 고딕"/>
               </a:rPr>
-              <a:t>④ 지역투자 별도 심사</a:t>
-            </a:r>
-          </a:p>
-        </p:txBody>
-      </p:sp>
-      <p:sp>
-        <p:nvSpPr>
-          <p:cNvPr id="35" name="Rectangle 34"/>
-          <p:cNvSpPr/>
-          <p:nvPr/>
-        </p:nvSpPr>
-        <p:spPr>
-          <a:xfrm>
-            <a:off x="9784080" y="5989320"/>
-            <a:ext cx="2194560" cy="292608"/>
-          </a:xfrm>
-          <a:prstGeom prst="rect">
-            <a:avLst/>
-          </a:prstGeom>
-          <a:solidFill>
-            <a:srgbClr val="1A237E"/>
+              <a:t>⑥</a:t>
+            </a:r>
+          </a:p>
+        </p:txBody>
+      </p:sp>
+      <p:sp>
+        <p:nvSpPr>
+          <p:cNvPr id="53" name="TextBox 52"/>
+          <p:cNvSpPr txBox="1"/>
+          <p:nvPr/>
+        </p:nvSpPr>
+        <p:spPr>
+          <a:xfrm>
+            <a:off x="9665208" y="1700784"/>
+            <a:ext cx="2084831" cy="329184"/>
+          </a:xfrm>
+          <a:prstGeom prst="rect">
+            <a:avLst/>
+          </a:prstGeom>
+          <a:noFill/>
+        </p:spPr>
+        <p:txBody>
+          <a:bodyPr wrap="square">
+            <a:spAutoFit/>
+          </a:bodyPr>
+          <a:lstStyle/>
+          <a:p>
+            <a:pPr algn="l"/>
+            <a:r>
+              <a:rPr sz="1100" b="1" i="0">
+                <a:solidFill>
+                  <a:srgbClr val="1B5E20"/>
+                </a:solidFill>
+                <a:latin typeface="맑은 고딕"/>
+              </a:rPr>
+              <a:t>외부감사 의무화</a:t>
+            </a:r>
+          </a:p>
+        </p:txBody>
+      </p:sp>
+      <p:sp>
+        <p:nvSpPr>
+          <p:cNvPr id="54" name="TextBox 53"/>
+          <p:cNvSpPr txBox="1"/>
+          <p:nvPr/>
+        </p:nvSpPr>
+        <p:spPr>
+          <a:xfrm>
+            <a:off x="9665208" y="2029968"/>
+            <a:ext cx="2084831" cy="365760"/>
+          </a:xfrm>
+          <a:prstGeom prst="rect">
+            <a:avLst/>
+          </a:prstGeom>
+          <a:noFill/>
+        </p:spPr>
+        <p:txBody>
+          <a:bodyPr wrap="square">
+            <a:spAutoFit/>
+          </a:bodyPr>
+          <a:lstStyle/>
+          <a:p>
+            <a:pPr algn="l"/>
+            <a:r>
+              <a:rPr sz="850" b="0" i="0">
+                <a:solidFill>
+                  <a:srgbClr val="757575"/>
+                </a:solidFill>
+                <a:latin typeface="맑은 고딕"/>
+              </a:rPr>
+              <a:t>독립 회계법인 정기 감사</a:t>
+            </a:r>
+          </a:p>
+        </p:txBody>
+      </p:sp>
+      <p:sp>
+        <p:nvSpPr>
+          <p:cNvPr id="55" name="Rectangle 54"/>
+          <p:cNvSpPr/>
+          <p:nvPr/>
+        </p:nvSpPr>
+        <p:spPr>
+          <a:xfrm>
+            <a:off x="9189720" y="2487168"/>
+            <a:ext cx="2606040" cy="768096"/>
+          </a:xfrm>
+          <a:prstGeom prst="rect">
+            <a:avLst/>
+          </a:prstGeom>
+          <a:solidFill>
+            <a:srgbClr val="FFFFFF"/>
+          </a:solidFill>
+          <a:ln w="12700">
+            <a:solidFill>
+              <a:srgbClr val="1B5E20"/>
+            </a:solidFill>
+          </a:ln>
+        </p:spPr>
+        <p:style>
+          <a:lnRef idx="1">
+            <a:schemeClr val="accent1"/>
+          </a:lnRef>
+          <a:fillRef idx="3">
+            <a:schemeClr val="accent1"/>
+          </a:fillRef>
+          <a:effectRef idx="2">
+            <a:schemeClr val="accent1"/>
+          </a:effectRef>
+          <a:fontRef idx="minor">
+            <a:schemeClr val="lt1"/>
+          </a:fontRef>
+        </p:style>
+        <p:txBody>
+          <a:bodyPr rtlCol="0" anchor="ctr"/>
+          <a:lstStyle/>
+          <a:p>
+            <a:pPr algn="ctr"/>
+          </a:p>
+        </p:txBody>
+      </p:sp>
+      <p:sp>
+        <p:nvSpPr>
+          <p:cNvPr id="56" name="Rectangle 55"/>
+          <p:cNvSpPr/>
+          <p:nvPr/>
+        </p:nvSpPr>
+        <p:spPr>
+          <a:xfrm>
+            <a:off x="9189720" y="2487168"/>
+            <a:ext cx="411480" cy="768096"/>
+          </a:xfrm>
+          <a:prstGeom prst="rect">
+            <a:avLst/>
+          </a:prstGeom>
+          <a:solidFill>
+            <a:srgbClr val="1B5E20"/>
           </a:solidFill>
           <a:ln>
             <a:noFill/>
@@ -7791,49 +8611,164 @@
       </p:sp>
       <p:sp>
         <p:nvSpPr>
-          <p:cNvPr id="36" name="TextBox 35"/>
-          <p:cNvSpPr txBox="1"/>
-          <p:nvPr/>
-        </p:nvSpPr>
-        <p:spPr>
-          <a:xfrm>
-            <a:off x="9829800" y="6007608"/>
-            <a:ext cx="2103120" cy="256032"/>
-          </a:xfrm>
-          <a:prstGeom prst="rect">
-            <a:avLst/>
-          </a:prstGeom>
-          <a:noFill/>
-        </p:spPr>
-        <p:txBody>
-          <a:bodyPr wrap="square">
-            <a:spAutoFit/>
-          </a:bodyPr>
-          <a:lstStyle/>
-          <a:p>
-            <a:pPr algn="ctr"/>
-            <a:r>
-              <a:rPr sz="900" b="0" i="0">
+          <p:cNvPr id="57" name="TextBox 56"/>
+          <p:cNvSpPr txBox="1"/>
+          <p:nvPr/>
+        </p:nvSpPr>
+        <p:spPr>
+          <a:xfrm>
+            <a:off x="9189720" y="2679192"/>
+            <a:ext cx="411480" cy="384048"/>
+          </a:xfrm>
+          <a:prstGeom prst="rect">
+            <a:avLst/>
+          </a:prstGeom>
+          <a:noFill/>
+        </p:spPr>
+        <p:txBody>
+          <a:bodyPr wrap="square">
+            <a:spAutoFit/>
+          </a:bodyPr>
+          <a:lstStyle/>
+          <a:p>
+            <a:pPr algn="ctr"/>
+            <a:r>
+              <a:rPr sz="1600" b="1" i="0">
                 <a:solidFill>
                   <a:srgbClr val="FFFFFF"/>
                 </a:solidFill>
                 <a:latin typeface="맑은 고딕"/>
               </a:rPr>
-              <a:t>⑤ 위원·회의록 공개</a:t>
-            </a:r>
-          </a:p>
-        </p:txBody>
-      </p:sp>
-      <p:sp>
-        <p:nvSpPr>
-          <p:cNvPr id="37" name="Rectangle 36"/>
-          <p:cNvSpPr/>
-          <p:nvPr/>
-        </p:nvSpPr>
-        <p:spPr>
-          <a:xfrm>
-            <a:off x="274320" y="5989320"/>
-            <a:ext cx="2194560" cy="292608"/>
+              <a:t>⑦</a:t>
+            </a:r>
+          </a:p>
+        </p:txBody>
+      </p:sp>
+      <p:sp>
+        <p:nvSpPr>
+          <p:cNvPr id="58" name="TextBox 57"/>
+          <p:cNvSpPr txBox="1"/>
+          <p:nvPr/>
+        </p:nvSpPr>
+        <p:spPr>
+          <a:xfrm>
+            <a:off x="9665208" y="2542032"/>
+            <a:ext cx="2084831" cy="329184"/>
+          </a:xfrm>
+          <a:prstGeom prst="rect">
+            <a:avLst/>
+          </a:prstGeom>
+          <a:noFill/>
+        </p:spPr>
+        <p:txBody>
+          <a:bodyPr wrap="square">
+            <a:spAutoFit/>
+          </a:bodyPr>
+          <a:lstStyle/>
+          <a:p>
+            <a:pPr algn="l"/>
+            <a:r>
+              <a:rPr sz="1100" b="1" i="0">
+                <a:solidFill>
+                  <a:srgbClr val="1B5E20"/>
+                </a:solidFill>
+                <a:latin typeface="맑은 고딕"/>
+              </a:rPr>
+              <a:t>의회 보고 의무화</a:t>
+            </a:r>
+          </a:p>
+        </p:txBody>
+      </p:sp>
+      <p:sp>
+        <p:nvSpPr>
+          <p:cNvPr id="59" name="TextBox 58"/>
+          <p:cNvSpPr txBox="1"/>
+          <p:nvPr/>
+        </p:nvSpPr>
+        <p:spPr>
+          <a:xfrm>
+            <a:off x="9665208" y="2871216"/>
+            <a:ext cx="2084831" cy="365760"/>
+          </a:xfrm>
+          <a:prstGeom prst="rect">
+            <a:avLst/>
+          </a:prstGeom>
+          <a:noFill/>
+        </p:spPr>
+        <p:txBody>
+          <a:bodyPr wrap="square">
+            <a:spAutoFit/>
+          </a:bodyPr>
+          <a:lstStyle/>
+          <a:p>
+            <a:pPr algn="l"/>
+            <a:r>
+              <a:rPr sz="850" b="0" i="0">
+                <a:solidFill>
+                  <a:srgbClr val="757575"/>
+                </a:solidFill>
+                <a:latin typeface="맑은 고딕"/>
+              </a:rPr>
+              <a:t>연 1회 이상 성과 보고</a:t>
+            </a:r>
+          </a:p>
+        </p:txBody>
+      </p:sp>
+      <p:sp>
+        <p:nvSpPr>
+          <p:cNvPr id="60" name="Rectangle 59"/>
+          <p:cNvSpPr/>
+          <p:nvPr/>
+        </p:nvSpPr>
+        <p:spPr>
+          <a:xfrm>
+            <a:off x="9189720" y="3328416"/>
+            <a:ext cx="2606040" cy="768096"/>
+          </a:xfrm>
+          <a:prstGeom prst="rect">
+            <a:avLst/>
+          </a:prstGeom>
+          <a:solidFill>
+            <a:srgbClr val="FFFFFF"/>
+          </a:solidFill>
+          <a:ln w="12700">
+            <a:solidFill>
+              <a:srgbClr val="1B5E20"/>
+            </a:solidFill>
+          </a:ln>
+        </p:spPr>
+        <p:style>
+          <a:lnRef idx="1">
+            <a:schemeClr val="accent1"/>
+          </a:lnRef>
+          <a:fillRef idx="3">
+            <a:schemeClr val="accent1"/>
+          </a:fillRef>
+          <a:effectRef idx="2">
+            <a:schemeClr val="accent1"/>
+          </a:effectRef>
+          <a:fontRef idx="minor">
+            <a:schemeClr val="lt1"/>
+          </a:fontRef>
+        </p:style>
+        <p:txBody>
+          <a:bodyPr rtlCol="0" anchor="ctr"/>
+          <a:lstStyle/>
+          <a:p>
+            <a:pPr algn="ctr"/>
+          </a:p>
+        </p:txBody>
+      </p:sp>
+      <p:sp>
+        <p:nvSpPr>
+          <p:cNvPr id="61" name="Rectangle 60"/>
+          <p:cNvSpPr/>
+          <p:nvPr/>
+        </p:nvSpPr>
+        <p:spPr>
+          <a:xfrm>
+            <a:off x="9189720" y="3328416"/>
+            <a:ext cx="411480" cy="768096"/>
           </a:xfrm>
           <a:prstGeom prst="rect">
             <a:avLst/>
@@ -7869,49 +8804,164 @@
       </p:sp>
       <p:sp>
         <p:nvSpPr>
-          <p:cNvPr id="38" name="TextBox 37"/>
-          <p:cNvSpPr txBox="1"/>
-          <p:nvPr/>
-        </p:nvSpPr>
-        <p:spPr>
-          <a:xfrm>
-            <a:off x="320040" y="6007608"/>
-            <a:ext cx="2103120" cy="256032"/>
-          </a:xfrm>
-          <a:prstGeom prst="rect">
-            <a:avLst/>
-          </a:prstGeom>
-          <a:noFill/>
-        </p:spPr>
-        <p:txBody>
-          <a:bodyPr wrap="square">
-            <a:spAutoFit/>
-          </a:bodyPr>
-          <a:lstStyle/>
-          <a:p>
-            <a:pPr algn="ctr"/>
-            <a:r>
-              <a:rPr sz="900" b="0" i="0">
+          <p:cNvPr id="62" name="TextBox 61"/>
+          <p:cNvSpPr txBox="1"/>
+          <p:nvPr/>
+        </p:nvSpPr>
+        <p:spPr>
+          <a:xfrm>
+            <a:off x="9189720" y="3520440"/>
+            <a:ext cx="411480" cy="384048"/>
+          </a:xfrm>
+          <a:prstGeom prst="rect">
+            <a:avLst/>
+          </a:prstGeom>
+          <a:noFill/>
+        </p:spPr>
+        <p:txBody>
+          <a:bodyPr wrap="square">
+            <a:spAutoFit/>
+          </a:bodyPr>
+          <a:lstStyle/>
+          <a:p>
+            <a:pPr algn="ctr"/>
+            <a:r>
+              <a:rPr sz="1600" b="1" i="0">
                 <a:solidFill>
                   <a:srgbClr val="FFFFFF"/>
                 </a:solidFill>
                 <a:latin typeface="맑은 고딕"/>
               </a:rPr>
-              <a:t>⑥ 외부감사 의무</a:t>
-            </a:r>
-          </a:p>
-        </p:txBody>
-      </p:sp>
-      <p:sp>
-        <p:nvSpPr>
-          <p:cNvPr id="39" name="Rectangle 38"/>
-          <p:cNvSpPr/>
-          <p:nvPr/>
-        </p:nvSpPr>
-        <p:spPr>
-          <a:xfrm>
-            <a:off x="2651760" y="5989320"/>
-            <a:ext cx="2194560" cy="292608"/>
+              <a:t>⑧</a:t>
+            </a:r>
+          </a:p>
+        </p:txBody>
+      </p:sp>
+      <p:sp>
+        <p:nvSpPr>
+          <p:cNvPr id="63" name="TextBox 62"/>
+          <p:cNvSpPr txBox="1"/>
+          <p:nvPr/>
+        </p:nvSpPr>
+        <p:spPr>
+          <a:xfrm>
+            <a:off x="9665208" y="3383280"/>
+            <a:ext cx="2084831" cy="329184"/>
+          </a:xfrm>
+          <a:prstGeom prst="rect">
+            <a:avLst/>
+          </a:prstGeom>
+          <a:noFill/>
+        </p:spPr>
+        <p:txBody>
+          <a:bodyPr wrap="square">
+            <a:spAutoFit/>
+          </a:bodyPr>
+          <a:lstStyle/>
+          <a:p>
+            <a:pPr algn="l"/>
+            <a:r>
+              <a:rPr sz="1100" b="1" i="0">
+                <a:solidFill>
+                  <a:srgbClr val="1B5E20"/>
+                </a:solidFill>
+                <a:latin typeface="맑은 고딕"/>
+              </a:rPr>
+              <a:t>이해충돌 신고 의무</a:t>
+            </a:r>
+          </a:p>
+        </p:txBody>
+      </p:sp>
+      <p:sp>
+        <p:nvSpPr>
+          <p:cNvPr id="64" name="TextBox 63"/>
+          <p:cNvSpPr txBox="1"/>
+          <p:nvPr/>
+        </p:nvSpPr>
+        <p:spPr>
+          <a:xfrm>
+            <a:off x="9665208" y="3712464"/>
+            <a:ext cx="2084831" cy="365760"/>
+          </a:xfrm>
+          <a:prstGeom prst="rect">
+            <a:avLst/>
+          </a:prstGeom>
+          <a:noFill/>
+        </p:spPr>
+        <p:txBody>
+          <a:bodyPr wrap="square">
+            <a:spAutoFit/>
+          </a:bodyPr>
+          <a:lstStyle/>
+          <a:p>
+            <a:pPr algn="l"/>
+            <a:r>
+              <a:rPr sz="850" b="0" i="0">
+                <a:solidFill>
+                  <a:srgbClr val="757575"/>
+                </a:solidFill>
+                <a:latin typeface="맑은 고딕"/>
+              </a:rPr>
+              <a:t>위원·직원 이해충돌 즉시 신고</a:t>
+            </a:r>
+          </a:p>
+        </p:txBody>
+      </p:sp>
+      <p:sp>
+        <p:nvSpPr>
+          <p:cNvPr id="65" name="Rectangle 64"/>
+          <p:cNvSpPr/>
+          <p:nvPr/>
+        </p:nvSpPr>
+        <p:spPr>
+          <a:xfrm>
+            <a:off x="9189720" y="4169664"/>
+            <a:ext cx="2606040" cy="768096"/>
+          </a:xfrm>
+          <a:prstGeom prst="rect">
+            <a:avLst/>
+          </a:prstGeom>
+          <a:solidFill>
+            <a:srgbClr val="FFFFFF"/>
+          </a:solidFill>
+          <a:ln w="12700">
+            <a:solidFill>
+              <a:srgbClr val="1B5E20"/>
+            </a:solidFill>
+          </a:ln>
+        </p:spPr>
+        <p:style>
+          <a:lnRef idx="1">
+            <a:schemeClr val="accent1"/>
+          </a:lnRef>
+          <a:fillRef idx="3">
+            <a:schemeClr val="accent1"/>
+          </a:fillRef>
+          <a:effectRef idx="2">
+            <a:schemeClr val="accent1"/>
+          </a:effectRef>
+          <a:fontRef idx="minor">
+            <a:schemeClr val="lt1"/>
+          </a:fontRef>
+        </p:style>
+        <p:txBody>
+          <a:bodyPr rtlCol="0" anchor="ctr"/>
+          <a:lstStyle/>
+          <a:p>
+            <a:pPr algn="ctr"/>
+          </a:p>
+        </p:txBody>
+      </p:sp>
+      <p:sp>
+        <p:nvSpPr>
+          <p:cNvPr id="66" name="Rectangle 65"/>
+          <p:cNvSpPr/>
+          <p:nvPr/>
+        </p:nvSpPr>
+        <p:spPr>
+          <a:xfrm>
+            <a:off x="9189720" y="4169664"/>
+            <a:ext cx="411480" cy="768096"/>
           </a:xfrm>
           <a:prstGeom prst="rect">
             <a:avLst/>
@@ -7947,49 +8997,164 @@
       </p:sp>
       <p:sp>
         <p:nvSpPr>
-          <p:cNvPr id="40" name="TextBox 39"/>
-          <p:cNvSpPr txBox="1"/>
-          <p:nvPr/>
-        </p:nvSpPr>
-        <p:spPr>
-          <a:xfrm>
-            <a:off x="2697479" y="6007608"/>
-            <a:ext cx="2103120" cy="256032"/>
-          </a:xfrm>
-          <a:prstGeom prst="rect">
-            <a:avLst/>
-          </a:prstGeom>
-          <a:noFill/>
-        </p:spPr>
-        <p:txBody>
-          <a:bodyPr wrap="square">
-            <a:spAutoFit/>
-          </a:bodyPr>
-          <a:lstStyle/>
-          <a:p>
-            <a:pPr algn="ctr"/>
-            <a:r>
-              <a:rPr sz="900" b="0" i="0">
+          <p:cNvPr id="67" name="TextBox 66"/>
+          <p:cNvSpPr txBox="1"/>
+          <p:nvPr/>
+        </p:nvSpPr>
+        <p:spPr>
+          <a:xfrm>
+            <a:off x="9189720" y="4361688"/>
+            <a:ext cx="411480" cy="384048"/>
+          </a:xfrm>
+          <a:prstGeom prst="rect">
+            <a:avLst/>
+          </a:prstGeom>
+          <a:noFill/>
+        </p:spPr>
+        <p:txBody>
+          <a:bodyPr wrap="square">
+            <a:spAutoFit/>
+          </a:bodyPr>
+          <a:lstStyle/>
+          <a:p>
+            <a:pPr algn="ctr"/>
+            <a:r>
+              <a:rPr sz="1600" b="1" i="0">
                 <a:solidFill>
                   <a:srgbClr val="FFFFFF"/>
                 </a:solidFill>
                 <a:latin typeface="맑은 고딕"/>
               </a:rPr>
-              <a:t>⑦ 의회보고 의무</a:t>
-            </a:r>
-          </a:p>
-        </p:txBody>
-      </p:sp>
-      <p:sp>
-        <p:nvSpPr>
-          <p:cNvPr id="41" name="Rectangle 40"/>
-          <p:cNvSpPr/>
-          <p:nvPr/>
-        </p:nvSpPr>
-        <p:spPr>
-          <a:xfrm>
-            <a:off x="5029200" y="5989320"/>
-            <a:ext cx="2194560" cy="292608"/>
+              <a:t>⑨</a:t>
+            </a:r>
+          </a:p>
+        </p:txBody>
+      </p:sp>
+      <p:sp>
+        <p:nvSpPr>
+          <p:cNvPr id="68" name="TextBox 67"/>
+          <p:cNvSpPr txBox="1"/>
+          <p:nvPr/>
+        </p:nvSpPr>
+        <p:spPr>
+          <a:xfrm>
+            <a:off x="9665208" y="4224528"/>
+            <a:ext cx="2084831" cy="329184"/>
+          </a:xfrm>
+          <a:prstGeom prst="rect">
+            <a:avLst/>
+          </a:prstGeom>
+          <a:noFill/>
+        </p:spPr>
+        <p:txBody>
+          <a:bodyPr wrap="square">
+            <a:spAutoFit/>
+          </a:bodyPr>
+          <a:lstStyle/>
+          <a:p>
+            <a:pPr algn="l"/>
+            <a:r>
+              <a:rPr sz="1100" b="1" i="0">
+                <a:solidFill>
+                  <a:srgbClr val="1B5E20"/>
+                </a:solidFill>
+                <a:latin typeface="맑은 고딕"/>
+              </a:rPr>
+              <a:t>운용기관 공개경쟁</a:t>
+            </a:r>
+          </a:p>
+        </p:txBody>
+      </p:sp>
+      <p:sp>
+        <p:nvSpPr>
+          <p:cNvPr id="69" name="TextBox 68"/>
+          <p:cNvSpPr txBox="1"/>
+          <p:nvPr/>
+        </p:nvSpPr>
+        <p:spPr>
+          <a:xfrm>
+            <a:off x="9665208" y="4553712"/>
+            <a:ext cx="2084831" cy="365760"/>
+          </a:xfrm>
+          <a:prstGeom prst="rect">
+            <a:avLst/>
+          </a:prstGeom>
+          <a:noFill/>
+        </p:spPr>
+        <p:txBody>
+          <a:bodyPr wrap="square">
+            <a:spAutoFit/>
+          </a:bodyPr>
+          <a:lstStyle/>
+          <a:p>
+            <a:pPr algn="l"/>
+            <a:r>
+              <a:rPr sz="850" b="0" i="0">
+                <a:solidFill>
+                  <a:srgbClr val="757575"/>
+                </a:solidFill>
+                <a:latin typeface="맑은 고딕"/>
+              </a:rPr>
+              <a:t>RFI→RFP 공개입찰 → 내정 불가</a:t>
+            </a:r>
+          </a:p>
+        </p:txBody>
+      </p:sp>
+      <p:sp>
+        <p:nvSpPr>
+          <p:cNvPr id="70" name="Rectangle 69"/>
+          <p:cNvSpPr/>
+          <p:nvPr/>
+        </p:nvSpPr>
+        <p:spPr>
+          <a:xfrm>
+            <a:off x="9189720" y="5010912"/>
+            <a:ext cx="2606040" cy="768096"/>
+          </a:xfrm>
+          <a:prstGeom prst="rect">
+            <a:avLst/>
+          </a:prstGeom>
+          <a:solidFill>
+            <a:srgbClr val="FFFFFF"/>
+          </a:solidFill>
+          <a:ln w="12700">
+            <a:solidFill>
+              <a:srgbClr val="1B5E20"/>
+            </a:solidFill>
+          </a:ln>
+        </p:spPr>
+        <p:style>
+          <a:lnRef idx="1">
+            <a:schemeClr val="accent1"/>
+          </a:lnRef>
+          <a:fillRef idx="3">
+            <a:schemeClr val="accent1"/>
+          </a:fillRef>
+          <a:effectRef idx="2">
+            <a:schemeClr val="accent1"/>
+          </a:effectRef>
+          <a:fontRef idx="minor">
+            <a:schemeClr val="lt1"/>
+          </a:fontRef>
+        </p:style>
+        <p:txBody>
+          <a:bodyPr rtlCol="0" anchor="ctr"/>
+          <a:lstStyle/>
+          <a:p>
+            <a:pPr algn="ctr"/>
+          </a:p>
+        </p:txBody>
+      </p:sp>
+      <p:sp>
+        <p:nvSpPr>
+          <p:cNvPr id="71" name="Rectangle 70"/>
+          <p:cNvSpPr/>
+          <p:nvPr/>
+        </p:nvSpPr>
+        <p:spPr>
+          <a:xfrm>
+            <a:off x="9189720" y="5010912"/>
+            <a:ext cx="411480" cy="768096"/>
           </a:xfrm>
           <a:prstGeom prst="rect">
             <a:avLst/>
@@ -8025,55 +9190,160 @@
       </p:sp>
       <p:sp>
         <p:nvSpPr>
-          <p:cNvPr id="42" name="TextBox 41"/>
-          <p:cNvSpPr txBox="1"/>
-          <p:nvPr/>
-        </p:nvSpPr>
-        <p:spPr>
-          <a:xfrm>
-            <a:off x="5074920" y="6007608"/>
-            <a:ext cx="2103120" cy="256032"/>
-          </a:xfrm>
-          <a:prstGeom prst="rect">
-            <a:avLst/>
-          </a:prstGeom>
-          <a:noFill/>
-        </p:spPr>
-        <p:txBody>
-          <a:bodyPr wrap="square">
-            <a:spAutoFit/>
-          </a:bodyPr>
-          <a:lstStyle/>
-          <a:p>
-            <a:pPr algn="ctr"/>
-            <a:r>
-              <a:rPr sz="900" b="0" i="0">
+          <p:cNvPr id="72" name="TextBox 71"/>
+          <p:cNvSpPr txBox="1"/>
+          <p:nvPr/>
+        </p:nvSpPr>
+        <p:spPr>
+          <a:xfrm>
+            <a:off x="9189720" y="5202936"/>
+            <a:ext cx="411480" cy="384048"/>
+          </a:xfrm>
+          <a:prstGeom prst="rect">
+            <a:avLst/>
+          </a:prstGeom>
+          <a:noFill/>
+        </p:spPr>
+        <p:txBody>
+          <a:bodyPr wrap="square">
+            <a:spAutoFit/>
+          </a:bodyPr>
+          <a:lstStyle/>
+          <a:p>
+            <a:pPr algn="ctr"/>
+            <a:r>
+              <a:rPr sz="1600" b="1" i="0">
                 <a:solidFill>
                   <a:srgbClr val="FFFFFF"/>
                 </a:solidFill>
                 <a:latin typeface="맑은 고딕"/>
               </a:rPr>
-              <a:t>⑧ 이해충돌 신고 의무</a:t>
-            </a:r>
-          </a:p>
-        </p:txBody>
-      </p:sp>
-      <p:sp>
-        <p:nvSpPr>
-          <p:cNvPr id="43" name="Rectangle 42"/>
-          <p:cNvSpPr/>
-          <p:nvPr/>
-        </p:nvSpPr>
-        <p:spPr>
-          <a:xfrm>
-            <a:off x="7406640" y="5989320"/>
-            <a:ext cx="2194560" cy="292608"/>
-          </a:xfrm>
-          <a:prstGeom prst="rect">
-            <a:avLst/>
-          </a:prstGeom>
-          <a:solidFill>
-            <a:srgbClr val="1B5E20"/>
+              <a:t>⑩</a:t>
+            </a:r>
+          </a:p>
+        </p:txBody>
+      </p:sp>
+      <p:sp>
+        <p:nvSpPr>
+          <p:cNvPr id="73" name="TextBox 72"/>
+          <p:cNvSpPr txBox="1"/>
+          <p:nvPr/>
+        </p:nvSpPr>
+        <p:spPr>
+          <a:xfrm>
+            <a:off x="9665208" y="5065776"/>
+            <a:ext cx="2084831" cy="329184"/>
+          </a:xfrm>
+          <a:prstGeom prst="rect">
+            <a:avLst/>
+          </a:prstGeom>
+          <a:noFill/>
+        </p:spPr>
+        <p:txBody>
+          <a:bodyPr wrap="square">
+            <a:spAutoFit/>
+          </a:bodyPr>
+          <a:lstStyle/>
+          <a:p>
+            <a:pPr algn="l"/>
+            <a:r>
+              <a:rPr sz="1100" b="1" i="0">
+                <a:solidFill>
+                  <a:srgbClr val="1B5E20"/>
+                </a:solidFill>
+                <a:latin typeface="맑은 고딕"/>
+              </a:rPr>
+              <a:t>성과평가 전면 공개</a:t>
+            </a:r>
+          </a:p>
+        </p:txBody>
+      </p:sp>
+      <p:sp>
+        <p:nvSpPr>
+          <p:cNvPr id="74" name="TextBox 73"/>
+          <p:cNvSpPr txBox="1"/>
+          <p:nvPr/>
+        </p:nvSpPr>
+        <p:spPr>
+          <a:xfrm>
+            <a:off x="9665208" y="5394960"/>
+            <a:ext cx="2084831" cy="365760"/>
+          </a:xfrm>
+          <a:prstGeom prst="rect">
+            <a:avLst/>
+          </a:prstGeom>
+          <a:noFill/>
+        </p:spPr>
+        <p:txBody>
+          <a:bodyPr wrap="square">
+            <a:spAutoFit/>
+          </a:bodyPr>
+          <a:lstStyle/>
+          <a:p>
+            <a:pPr algn="l"/>
+            <a:r>
+              <a:rPr sz="850" b="0" i="0">
+                <a:solidFill>
+                  <a:srgbClr val="757575"/>
+                </a:solidFill>
+                <a:latin typeface="맑은 고딕"/>
+              </a:rPr>
+              <a:t>모든 수익률·위험지표 공개</a:t>
+            </a:r>
+          </a:p>
+        </p:txBody>
+      </p:sp>
+      <p:sp>
+        <p:nvSpPr>
+          <p:cNvPr id="75" name="TextBox 74"/>
+          <p:cNvSpPr txBox="1"/>
+          <p:nvPr/>
+        </p:nvSpPr>
+        <p:spPr>
+          <a:xfrm>
+            <a:off x="365760" y="6108192"/>
+            <a:ext cx="11521440" cy="320040"/>
+          </a:xfrm>
+          <a:prstGeom prst="rect">
+            <a:avLst/>
+          </a:prstGeom>
+          <a:noFill/>
+        </p:spPr>
+        <p:txBody>
+          <a:bodyPr wrap="square">
+            <a:spAutoFit/>
+          </a:bodyPr>
+          <a:lstStyle/>
+          <a:p>
+            <a:pPr algn="ctr"/>
+            <a:r>
+              <a:rPr sz="1100" b="1" i="0">
+                <a:solidFill>
+                  <a:srgbClr val="1A237E"/>
+                </a:solidFill>
+                <a:latin typeface="맑은 고딕"/>
+              </a:rPr>
+              <a:t>사전공시(규칙 고정) + 독립위원회(심사 분리) + 공개경쟁(선정 투명) + 의회감독(사후 통제)의 4중 방어선</a:t>
+            </a:r>
+          </a:p>
+        </p:txBody>
+      </p:sp>
+      <p:sp>
+        <p:nvSpPr>
+          <p:cNvPr id="76" name="Rectangle 75"/>
+          <p:cNvSpPr/>
+          <p:nvPr/>
+        </p:nvSpPr>
+        <p:spPr>
+          <a:xfrm>
+            <a:off x="0" y="6537960"/>
+            <a:ext cx="12188952" cy="320040"/>
+          </a:xfrm>
+          <a:prstGeom prst="rect">
+            <a:avLst/>
+          </a:prstGeom>
+          <a:solidFill>
+            <a:srgbClr val="1A237E"/>
           </a:solidFill>
           <a:ln>
             <a:noFill/>
@@ -8103,163 +9373,7 @@
       </p:sp>
       <p:sp>
         <p:nvSpPr>
-          <p:cNvPr id="44" name="TextBox 43"/>
-          <p:cNvSpPr txBox="1"/>
-          <p:nvPr/>
-        </p:nvSpPr>
-        <p:spPr>
-          <a:xfrm>
-            <a:off x="7452360" y="6007608"/>
-            <a:ext cx="2103120" cy="256032"/>
-          </a:xfrm>
-          <a:prstGeom prst="rect">
-            <a:avLst/>
-          </a:prstGeom>
-          <a:noFill/>
-        </p:spPr>
-        <p:txBody>
-          <a:bodyPr wrap="square">
-            <a:spAutoFit/>
-          </a:bodyPr>
-          <a:lstStyle/>
-          <a:p>
-            <a:pPr algn="ctr"/>
-            <a:r>
-              <a:rPr sz="900" b="0" i="0">
-                <a:solidFill>
-                  <a:srgbClr val="FFFFFF"/>
-                </a:solidFill>
-                <a:latin typeface="맑은 고딕"/>
-              </a:rPr>
-              <a:t>⑨ 운용기관 공개경쟁</a:t>
-            </a:r>
-          </a:p>
-        </p:txBody>
-      </p:sp>
-      <p:sp>
-        <p:nvSpPr>
-          <p:cNvPr id="45" name="Rectangle 44"/>
-          <p:cNvSpPr/>
-          <p:nvPr/>
-        </p:nvSpPr>
-        <p:spPr>
-          <a:xfrm>
-            <a:off x="9784080" y="5989320"/>
-            <a:ext cx="2194560" cy="292608"/>
-          </a:xfrm>
-          <a:prstGeom prst="rect">
-            <a:avLst/>
-          </a:prstGeom>
-          <a:solidFill>
-            <a:srgbClr val="1B5E20"/>
-          </a:solidFill>
-          <a:ln>
-            <a:noFill/>
-          </a:ln>
-        </p:spPr>
-        <p:style>
-          <a:lnRef idx="1">
-            <a:schemeClr val="accent1"/>
-          </a:lnRef>
-          <a:fillRef idx="3">
-            <a:schemeClr val="accent1"/>
-          </a:fillRef>
-          <a:effectRef idx="2">
-            <a:schemeClr val="accent1"/>
-          </a:effectRef>
-          <a:fontRef idx="minor">
-            <a:schemeClr val="lt1"/>
-          </a:fontRef>
-        </p:style>
-        <p:txBody>
-          <a:bodyPr rtlCol="0" anchor="ctr"/>
-          <a:lstStyle/>
-          <a:p>
-            <a:pPr algn="ctr"/>
-          </a:p>
-        </p:txBody>
-      </p:sp>
-      <p:sp>
-        <p:nvSpPr>
-          <p:cNvPr id="46" name="TextBox 45"/>
-          <p:cNvSpPr txBox="1"/>
-          <p:nvPr/>
-        </p:nvSpPr>
-        <p:spPr>
-          <a:xfrm>
-            <a:off x="9829800" y="6007608"/>
-            <a:ext cx="2103120" cy="256032"/>
-          </a:xfrm>
-          <a:prstGeom prst="rect">
-            <a:avLst/>
-          </a:prstGeom>
-          <a:noFill/>
-        </p:spPr>
-        <p:txBody>
-          <a:bodyPr wrap="square">
-            <a:spAutoFit/>
-          </a:bodyPr>
-          <a:lstStyle/>
-          <a:p>
-            <a:pPr algn="ctr"/>
-            <a:r>
-              <a:rPr sz="900" b="0" i="0">
-                <a:solidFill>
-                  <a:srgbClr val="FFFFFF"/>
-                </a:solidFill>
-                <a:latin typeface="맑은 고딕"/>
-              </a:rPr>
-              <a:t>⑩ 성과 전면 공개</a:t>
-            </a:r>
-          </a:p>
-        </p:txBody>
-      </p:sp>
-      <p:sp>
-        <p:nvSpPr>
-          <p:cNvPr id="47" name="Rectangle 46"/>
-          <p:cNvSpPr/>
-          <p:nvPr/>
-        </p:nvSpPr>
-        <p:spPr>
-          <a:xfrm>
-            <a:off x="0" y="6537960"/>
-            <a:ext cx="12188952" cy="320040"/>
-          </a:xfrm>
-          <a:prstGeom prst="rect">
-            <a:avLst/>
-          </a:prstGeom>
-          <a:solidFill>
-            <a:srgbClr val="1A237E"/>
-          </a:solidFill>
-          <a:ln>
-            <a:noFill/>
-          </a:ln>
-        </p:spPr>
-        <p:style>
-          <a:lnRef idx="1">
-            <a:schemeClr val="accent1"/>
-          </a:lnRef>
-          <a:fillRef idx="3">
-            <a:schemeClr val="accent1"/>
-          </a:fillRef>
-          <a:effectRef idx="2">
-            <a:schemeClr val="accent1"/>
-          </a:effectRef>
-          <a:fontRef idx="minor">
-            <a:schemeClr val="lt1"/>
-          </a:fontRef>
-        </p:style>
-        <p:txBody>
-          <a:bodyPr rtlCol="0" anchor="ctr"/>
-          <a:lstStyle/>
-          <a:p>
-            <a:pPr algn="ctr"/>
-          </a:p>
-        </p:txBody>
-      </p:sp>
-      <p:sp>
-        <p:nvSpPr>
-          <p:cNvPr id="48" name="TextBox 47"/>
+          <p:cNvPr id="77" name="TextBox 76"/>
           <p:cNvSpPr txBox="1"/>
           <p:nvPr/>
         </p:nvSpPr>
@@ -8294,7 +9408,7 @@
       </p:sp>
       <p:sp>
         <p:nvSpPr>
-          <p:cNvPr id="49" name="TextBox 48"/>
+          <p:cNvPr id="78" name="TextBox 77"/>
           <p:cNvSpPr txBox="1"/>
           <p:nvPr/>
         </p:nvSpPr>
